--- a/딥러닝응용_3조_최종발표.pptx
+++ b/딥러닝응용_3조_최종발표.pptx
@@ -14,6 +14,7 @@
     <p:sldId id="260" r:id="rId9"/>
     <p:sldId id="259" r:id="rId8"/>
     <p:sldId id="261" r:id="rId10"/>
+    <p:sldId id="270" r:id="rId26"/>
     <p:sldId id="264" r:id="rId13"/>
     <p:sldId id="265" r:id="rId14"/>
     <p:sldId id="268" r:id="rId24"/>
@@ -747,7 +748,7 @@
           <a:lstStyle/>
           <a:p>
             <a:r>
-              <a:t>그런데 한 가지 의문이 들 수 있습니다. 만약 두 모달리티 중 한쪽이 너무 강하다면 다른 쪽을 결합해도 의미가 없는 것 아닌가, 반대로 한쪽이 너무 약하면 오히려 융합 모델이 끌려 내려가는 것 아닌가 하는 의문입니다. 이걸 확인하기 위해 추가 실험을 했습니다. 이미지 모델의 학습량을 인위적으로 조절해서 강한 이미지·약한 이미지·중간 강도 이렇게 세 가지 시나리오를 만들고, 각 경우에서 융합 성능을 측정했습니다. 결과를 보시면, 이미지가 약한 경우, 두 모달이 비등한 경우, 이미지가 강한 경우 모두에서 융합 모델이 두 단독 모델을 능가했습니다. 즉 두 모달리티의 강도가 다양하게 변해도 융합 효과가 일관되게 나타난다는 것이 확인되었습니다. 이는 멀티모달 접근이 특정 조건에서만 운 좋게 작동하는 것이 아니라, 일반적으로 유효한 전략임을 보여줍니다.</a:t>
+              <a:t>그렇다면 이미지가 항상 좋은 상태로 들어오지 않을 때는 어떨까요? 조명이 나쁘거나 학습이 부족해 이미지가 약할 때, 그걸 결합하면 융합이 오히려 끌려 내려가지 않을까 하는 의문입니다. 그래서 이미지 모델을 일부러 덜 학습시켜 약하게 만든 경우와, 충분히 학습시켜 강하게 만든 경우 두 가지를 비교했습니다. 결과를 보시면 이미지가 약할 때 융합은 센서와 같은 수준을 그대로 유지합니다. 약한 정보에 끌려 내려가지 않고 손해를 보지 않는 겁니다. 반대로 이미지가 강할 때는 센서보다 약 0.06 크게 향상됩니다. 즉 융합은 이미지가 도움이 안 되면 센서 수준을 지키고, 유용하면 그만큼 이득을 가져갑니다. 결측과 품질 저하가 흔한 실제 산업 현장에서 융합이 안전한 선택인 이유입니다.</a:t>
             </a:r>
           </a:p>
         </p:txBody>
@@ -833,7 +834,7 @@
           <a:lstStyle/>
           <a:p>
             <a:r>
-              <a:t>결론입니다. 저희 프로젝트는 세 가지를 확인했습니다. 첫째, 두 모달리티가 함께 입력되는 시점에서 융합 모델이 센서 단독 0.974, 이미지 단독 0.928보다 높은 F1 0.981을 기록하여 멀티모달 결합의 효과를 정량적으로 확인했습니다. 둘째, 이미지 모델의 강도를 다양하게 바꿔서 추가 실험을 한 결과, 어떤 강도 조건에서도 융합 모델이 단독 모델을 능가해 융합 효과의 일관성을 확인했습니다. 셋째, 이미지가 들어오지 않는 시점에는 자동으로 센서 모델만 사용하도록 설계해서, 결측 상황에서도 시스템이 안정적으로 작동합니다. 즉 저희 프로젝트의 의의는 단순히 멀티모달이 좋다는 결론을 내리는 것이 아니라, 어떤 조건에서 어떻게 좋은지를 실험으로 밝히고, 실제 산업 환경에 적용 가능한 견고한 구조를 설계했다는 점입니다.</a:t>
+              <a:t>결론입니다. 저희 프로젝트는 세 가지를 확인했습니다. 첫째, 두 모달리티가 함께 입력되는 시점에서 융합 모델이 센서 단독 0.907, 이미지 단독 0.925보다 높은 F1 0.986을 기록했고, 이 차이는 통계적으로도 유의했습니다. 멀티모달 결합의 효과를 정량적으로 확인한 것입니다. 둘째, 이미지의 강도를 약하게도 강하게도 바꿔 본 결과, 이미지가 약할 때 융합은 센서 수준을 안전하게 유지하고 이미지가 강할 때는 그만큼 이득을 가져갔습니다. 즉 융합은 손해 없이 작동하며 정보가 좋을수록 더 좋아집니다. 셋째, 이미지가 들어오지 않는 시점에는 자동으로 센서 모델만 사용하도록 설계해서, 결측 상황에서도 시스템이 안정적으로 작동합니다. 즉 저희 프로젝트의 의의는 단순히 멀티모달이 좋다는 결론을 내리는 것이 아니라, 어떤 조건에서 어떻게 좋은지를 실험으로 밝히고, 실제 산업 환경에 적용 가능한 견고한 구조를 설계했다는 점입니다.</a:t>
             </a:r>
           </a:p>
         </p:txBody>
@@ -1005,7 +1006,7 @@
           <a:lstStyle/>
           <a:p>
             <a:r>
-              <a:t>결함 유형별로 모델이 얼마나 잘 작동하는지 분석한 결과입니다. NoNose 같은 단순한 단일 부품 결함은 F1 0.98로 거의 완벽하게 검출됩니다. 두 부품이 빠진 복합 결함은 0.87로 양호한 편입니다. 그런데 세 부품이 동시에 빠진 가장 복잡한 결함은 0.59로 검출 성능이 크게 떨어집니다. 이는 결함이 누적될수록 각 결함 유형의 시각적·센서적 특징이 서로 닮아져서 모델이 구분하기 어려워지기 때문입니다. 향후 개선이 필요한 핵심 지점이기도 합니다.</a:t>
+              <a:t>여기서 저희 프로젝트가 어떻게 발전했는지 말씀드리겠습니다. 사실 중간발표 때는 융합 모델이 전체 구간에서 F1 0.88로, 센서 단독 0.93보다 오히려 낮았습니다. 멀티모달인데 단독보다 못한 결과였죠. 저희는 그 원인을 데이터 불균형으로 진단했습니다. 이미지는 9천여 장인데 센서는 12만 시퀀스라, 융합에서 이미지가 정보를 더하기보다 노이즈로 작용한 겁니다. 그래서 최종 단계에서 이미지 커버리지를 늘리고 융합 방식을 개선했고, 두 모달리티가 균형 있게 함께 들어오는 구간에서는 융합이 두 단독을 모두 넘어섰습니다. 즉 저희가 세운 가설, ‘멀티모달의 성공은 데이터 균형에 달려 있다’를 직접 검증한 것입니다.</a:t>
             </a:r>
           </a:p>
         </p:txBody>
@@ -1075,7 +1076,77 @@
           <a:lstStyle/>
           <a:p>
             <a:r>
-              <a:t>한계도 분명히 있습니다. 단일 데이터셋으로만 검증해서 다른 제조 환경에서도 같은 효과가 나타날지는 추가 검증이 필요합니다. 또 융합 모델의 성능 향상이 크지는 않아서 통계적 유의성 검증이 더 필요합니다. 복합 결함 케이스도 0.59로 개선 여지가 큽니다. 향후 방향은 세 가지입니다. 다른 제조 환경 데이터로 일반화 검증, 도메인 지식을 학습에 반영하는 Knowledge Infusion, 그리고 복합 결함을 위한 특화 모델이나 데이터 증강 등입니다.</a:t>
+              <a:t>결함 유형별로 모델이 얼마나 잘 작동하는지 분석한 결과입니다. NoNose 같은 단순한 단일 부품 결함은 F1 0.98로 거의 완벽하게 검출됩니다. 두 부품이 빠진 복합 결함은 0.89로 양호한 편입니다. 그런데 세 부품이 동시에 빠진 가장 복잡한 결함은 0.62로 검출 성능이 크게 떨어집니다. 이는 결함이 누적될수록 각 결함 유형의 시각적·센서적 특징이 서로 닮아져서 모델이 구분하기 어려워지기 때문입니다. 향후 개선이 필요한 핵심 지점이기도 합니다.</a:t>
+            </a:r>
+          </a:p>
+        </p:txBody>
+      </p:sp>
+      <p:sp>
+        <p:nvSpPr>
+          <p:cNvPr id="4" name="Slide Number Placeholder 3"/>
+          <p:cNvSpPr>
+            <a:spLocks noGrp="1"/>
+          </p:cNvSpPr>
+          <p:nvPr>
+            <p:ph type="sldNum" idx="5" sz="quarter"/>
+          </p:nvPr>
+        </p:nvSpPr>
+        <p:spPr/>
+      </p:sp>
+    </p:spTree>
+  </p:cSld>
+  <p:clrMapOvr>
+    <a:masterClrMapping/>
+  </p:clrMapOvr>
+</p:notes>
+</file>
+
+<file path=ppt/notesSlides/notesSlide15.xml><?xml version="1.0" encoding="utf-8"?>
+<p:notes xmlns:a="http://schemas.openxmlformats.org/drawingml/2006/main" xmlns:p="http://schemas.openxmlformats.org/presentationml/2006/main" xmlns:r="http://schemas.openxmlformats.org/officeDocument/2006/relationships">
+  <p:cSld>
+    <p:spTree>
+      <p:nvGrpSpPr>
+        <p:cNvPr id="1" name=""/>
+        <p:cNvGrpSpPr/>
+        <p:nvPr/>
+      </p:nvGrpSpPr>
+      <p:grpSpPr>
+        <a:xfrm>
+          <a:off x="0" y="0"/>
+          <a:ext cx="0" cy="0"/>
+          <a:chOff x="0" y="0"/>
+          <a:chExt cx="0" cy="0"/>
+        </a:xfrm>
+      </p:grpSpPr>
+      <p:sp>
+        <p:nvSpPr>
+          <p:cNvPr id="2" name="Slide Image Placeholder 1"/>
+          <p:cNvSpPr>
+            <a:spLocks noGrp="1"/>
+          </p:cNvSpPr>
+          <p:nvPr>
+            <p:ph type="sldImg" idx="2"/>
+          </p:nvPr>
+        </p:nvSpPr>
+        <p:spPr/>
+      </p:sp>
+      <p:sp>
+        <p:nvSpPr>
+          <p:cNvPr id="3" name="Notes Placeholder 2"/>
+          <p:cNvSpPr>
+            <a:spLocks noGrp="1"/>
+          </p:cNvSpPr>
+          <p:nvPr>
+            <p:ph type="body" idx="3" sz="quarter"/>
+          </p:nvPr>
+        </p:nvSpPr>
+        <p:spPr/>
+        <p:txBody>
+          <a:bodyPr/>
+          <a:lstStyle/>
+          <a:p>
+            <a:r>
+              <a:t>한계도 분명히 있습니다. 첫째, 단일 데이터셋으로만 검증해서 다른 제조 환경에서도 같은 효과가 나타날지는 추가 검증이 필요합니다. 둘째, 융합의 이득은 이미지가 실제로 들어오는 시점, 즉 전체의 약 41% 구간에 집중됩니다. 이 구간에선 향상이 뚜렷하고 통계적으로 유의했지만, 전체 시점으로 평균을 내면 이득의 폭은 줄어듭니다. 따라서 이미지 커버리지를 더 넓히는 것이 중요한 과제입니다. 셋째, 세 부품이 동시에 빠진 복합 결함은 F1 0.62로 개선 여지가 큽니다. 향후 방향은 다른 제조 환경 데이터로 일반화 검증, 도메인 지식을 학습에 반영하는 Knowledge Infusion, 그리고 복합 결함을 위한 특화 모델이나 데이터 증강입니다.</a:t>
             </a:r>
           </a:p>
         </p:txBody>
@@ -2114,7 +2185,7 @@
           <a:lstStyle/>
           <a:p>
             <a:r>
-              <a:t>첫 번째 핵심 결과입니다. 이 그래프는 카메라 이미지가 함께 입력되는 시점, 즉 두 모달리티 데이터가 모두 있는 2,161개 시점에서 각 모델의 성능을 측정한 것입니다. 평가 지표는 클래스 불균형을 고려한 Weighted F1 점수입니다. 결과를 보시면, 센서 단독 모델이 0.974, 카메라 두 대를 결합한 이미지 단독 모델이 0.928, 그리고 두 모델을 결합한 융합 모델이 0.981로 가장 높습니다. 차이가 크지는 않지만 중요한 점은 융합 모델이 센서·이미지 어느 한쪽보다도 더 나은 성능을 보였다는 것입니다. 이는 두 모달리티가 서로 다른 정보를 제공하고 있고, 융합 모델이 그 정보를 종합해서 더 정확한 판단을 내릴 수 있다는 것을 의미합니다. 즉 멀티모달 결합의 효과가 실제로 존재한다는 것을 보여줍니다.</a:t>
+              <a:t>앞서 세운 가설을 검증한 핵심 근거가 이 그래프입니다. 두 모달리티 데이터가 모두 있는 3,912개 시점에서 측정했고, 지표는 클래스 불균형을 고려한 Weighted F1입니다. 센서 단독 0.907, 이미지 단독 0.925, 그리고 두 모델의 예측 확률을 가중 결합한 융합 모델이 0.986으로 두 단독을 모두 뚜렷하게 능가했습니다. 이 차이는 우연이 아닙니다. 부트스트랩 검정 결과 융합과 센서의 차이가 평균 0.078, 95% 신뢰구간이 0보다 커서 통계적으로 유의했습니다. 두 모달리티가 서로 다른 정보를 담고 있고, 융합이 그것을 종합해 더 정확히 판단한다는 것을 보여줍니다.</a:t>
             </a:r>
           </a:p>
         </p:txBody>
@@ -5250,7 +5321,7 @@
                   <a:srgbClr val="FFFFFF"/>
                 </a:solidFill>
               </a:rPr>
-              <a:t>07</a:t>
+              <a:t>08</a:t>
             </a:r>
             <a:endParaRPr lang="ko-KR" altLang="en-US" sz="1600" b="1">
               <a:solidFill>
@@ -5473,7 +5544,7 @@
                   <a:srgbClr val="FFFFFF"/>
                 </a:solidFill>
               </a:rPr>
-              <a:t>09</a:t>
+              <a:t>10</a:t>
             </a:r>
             <a:endParaRPr lang="ko-KR" altLang="en-US" sz="1600" b="1">
               <a:solidFill>
@@ -5685,7 +5756,7 @@
                   <a:ea typeface="나눔고딕" panose="020D0604000000000000" pitchFamily="50" charset="-127"/>
                   <a:cs typeface="Arial" panose="020B0604020202020204" pitchFamily="34" charset="0"/>
                 </a:rPr>
-                <a:t>두 모달리티가 함께 입력되는 시점에서 융합이 두 단독을 능가 (F1 0.981 vs 0.974, 0.928)</a:t>
+                <a:t>두 모달리티가 함께 입력되는 시점에서 융합이 두 단독을 능가 (F1 0.986 vs 센서 0.907, 이미지 0.925 · 통계적으로 유의)</a:t>
               </a:r>
             </a:p>
           </p:txBody>
@@ -5782,7 +5853,7 @@
                   <a:ea typeface="나눔고딕" panose="020D0604000000000000" pitchFamily="50" charset="-127"/>
                   <a:cs typeface="Arial" panose="020B0604020202020204" pitchFamily="34" charset="0"/>
                 </a:rPr>
-                <a:t>이미지 강도를 약·중·강으로 바꿔도 융합 우위가 일관되게 유지됨</a:t>
+                <a:t>이미지가 약하면 융합이 센서 수준을 안전하게 유지하고, 이미지가 강할수록 이득이 커짐</a:t>
               </a:r>
             </a:p>
           </p:txBody>
@@ -6310,7 +6381,7 @@
                   <a:ea typeface="나눔고딕" panose="020D0604000000000000" pitchFamily="50" charset="-127"/>
                   <a:cs typeface="Arial" panose="020B0604020202020204" pitchFamily="34" charset="0"/>
                 </a:rPr>
-                <a:t> </a:t>
+                <a:t>강의에서 배운 CNN·LSTM·전이학습·멀티모달 융합을 실제 산업 데이터에 직접 구현·통합</a:t>
               </a:r>
             </a:p>
           </p:txBody>
@@ -6407,7 +6478,7 @@
                   <a:ea typeface="나눔고딕" panose="020D0604000000000000" pitchFamily="50" charset="-127"/>
                   <a:cs typeface="Arial" panose="020B0604020202020204" pitchFamily="34" charset="0"/>
                 </a:rPr>
-                <a:t> </a:t>
+                <a:t>중간발표의 ‘데이터 균형’ 가설을 추가 실험으로 검증한 가설–검증형 프로젝트</a:t>
               </a:r>
             </a:p>
           </p:txBody>
@@ -6841,7 +6912,7 @@
                   <a:srgbClr val="FFFFFF"/>
                 </a:solidFill>
               </a:rPr>
-              <a:t>08</a:t>
+              <a:t>09</a:t>
             </a:r>
             <a:endParaRPr lang="ko-KR" altLang="en-US" sz="1600" b="1">
               <a:solidFill>
@@ -7052,7 +7123,7 @@
                   <a:srgbClr val="FFFFFF"/>
                 </a:solidFill>
               </a:rPr>
-              <a:t>10</a:t>
+              <a:t>11</a:t>
             </a:r>
             <a:endParaRPr lang="ko-KR" altLang="en-US" sz="1600" b="1">
               <a:solidFill>
@@ -7520,7 +7591,7 @@
                 <a:ea typeface="나눔고딕" panose="020D0604000000000000" pitchFamily="50" charset="-127"/>
                 <a:cs typeface="Arial" panose="020B0604020202020204" pitchFamily="34" charset="0"/>
               </a:rPr>
-              <a:t>3부품 동시 빠짐 케이스 F1 0.59 → 특화 모델·데이터 증강 필요</a:t>
+              <a:t>3부품 동시 빠짐 케이스 F1 0.62 → 특화 모델·데이터 증강 필요</a:t>
             </a:r>
           </a:p>
         </p:txBody>
@@ -7685,7 +7756,7 @@
                 <a:ea typeface="나눔고딕" panose="020D0604000000000000" pitchFamily="50" charset="-127"/>
                 <a:cs typeface="Arial" panose="020B0604020202020204" pitchFamily="34" charset="0"/>
               </a:rPr>
-              <a:t>통계 유의성</a:t>
+              <a:t>이미지 커버리지 의존</a:t>
             </a:r>
           </a:p>
         </p:txBody>
@@ -7728,7 +7799,7 @@
                 <a:ea typeface="나눔고딕" panose="020D0604000000000000" pitchFamily="50" charset="-127"/>
                 <a:cs typeface="Arial" panose="020B0604020202020204" pitchFamily="34" charset="0"/>
               </a:rPr>
-              <a:t>융합 향상 폭이 작은 편 (약 +0.007) → 통계적 유의성 검증 추가 필요</a:t>
+              <a:t>융합 이득은 이미지가 있는 41% 구간에 집중 → 전체 구간으론 폭이 줄어듦, 커버리지 확대 필요</a:t>
             </a:r>
           </a:p>
         </p:txBody>
@@ -7826,6 +7897,944 @@
                 <a:cs typeface="Arial" panose="020B0604020202020204" pitchFamily="34" charset="0"/>
               </a:rPr>
               <a:t>→  도메인 지식(센서 정상 범위) 반영, 결함 유형별 특화 모델 등 후속 연구로 확장 가능</a:t>
+            </a:r>
+          </a:p>
+        </p:txBody>
+      </p:sp>
+    </p:spTree>
+  </p:cSld>
+  <p:clrMapOvr>
+    <a:masterClrMapping/>
+  </p:clrMapOvr>
+</p:sld>
+</file>
+
+<file path=ppt/slides/slide15.xml><?xml version="1.0" encoding="utf-8"?>
+<p:sld xmlns:a="http://schemas.openxmlformats.org/drawingml/2006/main" xmlns:p="http://schemas.openxmlformats.org/presentationml/2006/main" xmlns:r="http://schemas.openxmlformats.org/officeDocument/2006/relationships">
+  <p:cSld>
+    <p:spTree>
+      <p:nvGrpSpPr>
+        <p:cNvPr id="1" name=""/>
+        <p:cNvGrpSpPr/>
+        <p:nvPr/>
+      </p:nvGrpSpPr>
+      <p:grpSpPr/>
+      <p:sp>
+        <p:nvSpPr>
+          <p:cNvPr id="3" name="직사각형 2">
+            <a:extLst>
+              <a:ext uri="{FF2B5EF4-FFF2-40B4-BE49-F238E27FC236}">
+                <a16:creationId xmlns:a16="http://schemas.microsoft.com/office/drawing/2014/main" id="{B0C173FE-BDB9-44F4-9507-2BDC13B0A1C6}"/>
+              </a:ext>
+            </a:extLst>
+          </p:cNvPr>
+          <p:cNvSpPr/>
+          <p:nvPr/>
+        </p:nvSpPr>
+        <p:spPr>
+          <a:xfrm>
+            <a:off x="0" y="0"/>
+            <a:ext cx="12192000" cy="889000"/>
+          </a:xfrm>
+          <a:prstGeom prst="rect">
+            <a:avLst/>
+          </a:prstGeom>
+          <a:solidFill>
+            <a:srgbClr val="1B2A4A"/>
+          </a:solidFill>
+          <a:ln w="12700" cap="flat" cmpd="sng" algn="ctr">
+            <a:noFill/>
+            <a:prstDash val="solid"/>
+            <a:miter lim="800000"/>
+          </a:ln>
+        </p:spPr>
+        <p:style>
+          <a:lnRef idx="2">
+            <a:schemeClr val="accent1">
+              <a:shade val="15000"/>
+            </a:schemeClr>
+          </a:lnRef>
+          <a:fillRef idx="1">
+            <a:schemeClr val="accent1"/>
+          </a:fillRef>
+          <a:effectRef idx="0">
+            <a:schemeClr val="accent1"/>
+          </a:effectRef>
+          <a:fontRef idx="minor">
+            <a:schemeClr val="lt1"/>
+          </a:fontRef>
+        </p:style>
+        <p:txBody>
+          <a:bodyPr vertOverflow="clip" horzOverflow="clip" rtlCol="0" anchor="t"/>
+          <a:lstStyle/>
+          <a:p>
+            <a:pPr algn="l"/>
+            <a:endParaRPr lang="ko-KR" altLang="en-US"/>
+          </a:p>
+        </p:txBody>
+      </p:sp>
+      <p:sp>
+        <p:nvSpPr>
+          <p:cNvPr id="4" name="타원 3">
+            <a:extLst>
+              <a:ext uri="{FF2B5EF4-FFF2-40B4-BE49-F238E27FC236}">
+                <a16:creationId xmlns:a16="http://schemas.microsoft.com/office/drawing/2014/main" id="{48E27B50-23DB-4868-9BF9-20C20352E441}"/>
+              </a:ext>
+            </a:extLst>
+          </p:cNvPr>
+          <p:cNvSpPr/>
+          <p:nvPr/>
+        </p:nvSpPr>
+        <p:spPr>
+          <a:xfrm>
+            <a:off x="381000" y="190500"/>
+            <a:ext cx="508000" cy="508000"/>
+          </a:xfrm>
+          <a:prstGeom prst="ellipse">
+            <a:avLst/>
+          </a:prstGeom>
+          <a:solidFill>
+            <a:srgbClr val="16A295"/>
+          </a:solidFill>
+          <a:ln w="12700" cap="flat" cmpd="sng" algn="ctr">
+            <a:noFill/>
+            <a:prstDash val="solid"/>
+            <a:miter lim="800000"/>
+          </a:ln>
+        </p:spPr>
+        <p:style>
+          <a:lnRef idx="2">
+            <a:schemeClr val="accent1">
+              <a:shade val="15000"/>
+            </a:schemeClr>
+          </a:lnRef>
+          <a:fillRef idx="1">
+            <a:schemeClr val="accent1"/>
+          </a:fillRef>
+          <a:effectRef idx="0">
+            <a:schemeClr val="accent1"/>
+          </a:effectRef>
+          <a:fontRef idx="minor">
+            <a:schemeClr val="lt1"/>
+          </a:fontRef>
+        </p:style>
+        <p:txBody>
+          <a:bodyPr vertOverflow="clip" horzOverflow="clip" wrap="none" rtlCol="0" anchor="ctr" anchorCtr="0">
+            <a:noAutofit/>
+          </a:bodyPr>
+          <a:lstStyle/>
+          <a:p>
+            <a:pPr algn="ctr"/>
+            <a:r>
+              <a:rPr lang="en-US" altLang="ko-KR" sz="1600" b="1">
+                <a:solidFill>
+                  <a:srgbClr val="FFFFFF"/>
+                </a:solidFill>
+              </a:rPr>
+              <a:t>06</a:t>
+            </a:r>
+            <a:endParaRPr lang="ko-KR" altLang="en-US" sz="1600" b="1">
+              <a:solidFill>
+                <a:srgbClr val="FFFFFF"/>
+              </a:solidFill>
+            </a:endParaRPr>
+          </a:p>
+        </p:txBody>
+      </p:sp>
+      <p:sp>
+        <p:nvSpPr>
+          <p:cNvPr id="5" name="TextBox 4">
+            <a:extLst>
+              <a:ext uri="{FF2B5EF4-FFF2-40B4-BE49-F238E27FC236}">
+                <a16:creationId xmlns:a16="http://schemas.microsoft.com/office/drawing/2014/main" id="{C43E53DA-9CC3-4755-ADC0-C9AC56C8FBBD}"/>
+              </a:ext>
+            </a:extLst>
+          </p:cNvPr>
+          <p:cNvSpPr txBox="1"/>
+          <p:nvPr/>
+        </p:nvSpPr>
+        <p:spPr>
+          <a:xfrm>
+            <a:off x="1079500" y="190500"/>
+            <a:ext cx="5080000" cy="508000"/>
+          </a:xfrm>
+          <a:prstGeom prst="rect">
+            <a:avLst/>
+          </a:prstGeom>
+          <a:noFill/>
+        </p:spPr>
+        <p:txBody>
+          <a:bodyPr vertOverflow="overflow" vert="horz" wrap="square" rtlCol="0" anchor="t">
+            <a:noAutofit/>
+          </a:bodyPr>
+          <a:lstStyle/>
+          <a:p>
+            <a:pPr algn="l">
+              <a:lnSpc>
+                <a:spcPct val="130000"/>
+              </a:lnSpc>
+            </a:pPr>
+            <a:r>
+              <a:rPr lang="ko-KR" altLang="en-US" sz="2200" b="1">
+                <a:solidFill>
+                  <a:srgbClr val="FFFFFF"/>
+                </a:solidFill>
+                <a:latin typeface="나눔고딕" panose="020D0604000000000000" pitchFamily="50" charset="-127"/>
+                <a:ea typeface="나눔고딕" panose="020D0604000000000000" pitchFamily="50" charset="-127"/>
+                <a:cs typeface="Arial" panose="020B0604020202020204" pitchFamily="34" charset="0"/>
+              </a:rPr>
+              <a:t>중간발표 → 최종: 가설과 검증</a:t>
+            </a:r>
+          </a:p>
+        </p:txBody>
+      </p:sp>
+      <p:sp>
+        <p:nvSpPr>
+          <p:cNvPr id="6" name="사각형: 둥근 모서리 5">
+            <a:extLst>
+              <a:ext uri="{FF2B5EF4-FFF2-40B4-BE49-F238E27FC236}">
+                <a16:creationId xmlns:a16="http://schemas.microsoft.com/office/drawing/2014/main" id="{9A273F3F-2AEF-447C-BC82-BB76D864C141}"/>
+              </a:ext>
+            </a:extLst>
+          </p:cNvPr>
+          <p:cNvSpPr/>
+          <p:nvPr/>
+        </p:nvSpPr>
+        <p:spPr>
+          <a:xfrm>
+            <a:off x="508000" y="1795407"/>
+            <a:ext cx="3429000" cy="2286000"/>
+          </a:xfrm>
+          <a:prstGeom prst="roundRect">
+            <a:avLst/>
+          </a:prstGeom>
+          <a:solidFill>
+            <a:srgbClr val="F0F4F8"/>
+          </a:solidFill>
+          <a:ln w="12700" cap="flat" cmpd="sng" algn="ctr">
+            <a:noFill/>
+            <a:prstDash val="solid"/>
+            <a:miter lim="800000"/>
+          </a:ln>
+        </p:spPr>
+        <p:style>
+          <a:lnRef idx="2">
+            <a:schemeClr val="accent1">
+              <a:shade val="15000"/>
+            </a:schemeClr>
+          </a:lnRef>
+          <a:fillRef idx="1">
+            <a:schemeClr val="accent1"/>
+          </a:fillRef>
+          <a:effectRef idx="0">
+            <a:schemeClr val="accent1"/>
+          </a:effectRef>
+          <a:fontRef idx="minor">
+            <a:schemeClr val="lt1"/>
+          </a:fontRef>
+        </p:style>
+        <p:txBody>
+          <a:bodyPr vertOverflow="clip" horzOverflow="clip" rtlCol="0" anchor="t"/>
+          <a:lstStyle/>
+          <a:p>
+            <a:pPr algn="l"/>
+            <a:endParaRPr lang="ko-KR" altLang="en-US"/>
+          </a:p>
+        </p:txBody>
+      </p:sp>
+      <p:sp>
+        <p:nvSpPr>
+          <p:cNvPr id="7" name="타원 6">
+            <a:extLst>
+              <a:ext uri="{FF2B5EF4-FFF2-40B4-BE49-F238E27FC236}">
+                <a16:creationId xmlns:a16="http://schemas.microsoft.com/office/drawing/2014/main" id="{C73788D4-5A1F-400E-890E-B6BFD40CDCE1}"/>
+              </a:ext>
+            </a:extLst>
+          </p:cNvPr>
+          <p:cNvSpPr/>
+          <p:nvPr/>
+        </p:nvSpPr>
+        <p:spPr>
+          <a:xfrm>
+            <a:off x="698500" y="1960507"/>
+            <a:ext cx="558800" cy="558800"/>
+          </a:xfrm>
+          <a:prstGeom prst="ellipse">
+            <a:avLst/>
+          </a:prstGeom>
+          <a:solidFill>
+            <a:srgbClr val="E8584F"/>
+          </a:solidFill>
+          <a:ln w="12700" cap="flat" cmpd="sng" algn="ctr">
+            <a:noFill/>
+            <a:prstDash val="solid"/>
+            <a:miter lim="800000"/>
+          </a:ln>
+        </p:spPr>
+        <p:style>
+          <a:lnRef idx="2">
+            <a:schemeClr val="accent1">
+              <a:shade val="15000"/>
+            </a:schemeClr>
+          </a:lnRef>
+          <a:fillRef idx="1">
+            <a:schemeClr val="accent1"/>
+          </a:fillRef>
+          <a:effectRef idx="0">
+            <a:schemeClr val="accent1"/>
+          </a:effectRef>
+          <a:fontRef idx="minor">
+            <a:schemeClr val="lt1"/>
+          </a:fontRef>
+        </p:style>
+        <p:txBody>
+          <a:bodyPr vertOverflow="clip" horzOverflow="clip" wrap="none" rtlCol="0" anchor="ctr" anchorCtr="0">
+            <a:noAutofit/>
+          </a:bodyPr>
+          <a:lstStyle/>
+          <a:p>
+            <a:pPr algn="ctr"/>
+            <a:r>
+              <a:rPr lang="en-US" altLang="ko-KR" b="1">
+                <a:solidFill>
+                  <a:srgbClr val="FFFFFF"/>
+                </a:solidFill>
+              </a:rPr>
+              <a:t>1</a:t>
+            </a:r>
+            <a:endParaRPr lang="ko-KR" altLang="en-US" b="1">
+              <a:solidFill>
+                <a:srgbClr val="FFFFFF"/>
+              </a:solidFill>
+            </a:endParaRPr>
+          </a:p>
+        </p:txBody>
+      </p:sp>
+      <p:sp>
+        <p:nvSpPr>
+          <p:cNvPr id="8" name="TextBox 7">
+            <a:extLst>
+              <a:ext uri="{FF2B5EF4-FFF2-40B4-BE49-F238E27FC236}">
+                <a16:creationId xmlns:a16="http://schemas.microsoft.com/office/drawing/2014/main" id="{15996D88-2BF2-4E0A-A04D-9CEDE1D6FCF3}"/>
+              </a:ext>
+            </a:extLst>
+          </p:cNvPr>
+          <p:cNvSpPr txBox="1"/>
+          <p:nvPr/>
+        </p:nvSpPr>
+        <p:spPr>
+          <a:xfrm>
+            <a:off x="698500" y="2766485"/>
+            <a:ext cx="3048000" cy="381000"/>
+          </a:xfrm>
+          <a:prstGeom prst="rect">
+            <a:avLst/>
+          </a:prstGeom>
+          <a:noFill/>
+        </p:spPr>
+        <p:txBody>
+          <a:bodyPr vertOverflow="overflow" vert="horz" wrap="square" rtlCol="0" anchor="t">
+            <a:noAutofit/>
+          </a:bodyPr>
+          <a:lstStyle/>
+          <a:p>
+            <a:pPr algn="l"/>
+            <a:r>
+              <a:rPr lang="ko-KR" altLang="en-US" sz="1400" b="1">
+                <a:solidFill>
+                  <a:srgbClr val="1B2A4A"/>
+                </a:solidFill>
+                <a:latin typeface="나눔고딕" panose="020D0604000000000000" pitchFamily="50" charset="-127"/>
+                <a:ea typeface="나눔고딕" panose="020D0604000000000000" pitchFamily="50" charset="-127"/>
+                <a:cs typeface="Arial" panose="020B0604020202020204" pitchFamily="34" charset="0"/>
+              </a:rPr>
+              <a:t>중간발표: 융합이 졌다</a:t>
+            </a:r>
+          </a:p>
+        </p:txBody>
+      </p:sp>
+      <p:sp>
+        <p:nvSpPr>
+          <p:cNvPr id="9" name="TextBox 8">
+            <a:extLst>
+              <a:ext uri="{FF2B5EF4-FFF2-40B4-BE49-F238E27FC236}">
+                <a16:creationId xmlns:a16="http://schemas.microsoft.com/office/drawing/2014/main" id="{0BFC10EF-A748-466A-8A6C-C1187D2021BF}"/>
+              </a:ext>
+            </a:extLst>
+          </p:cNvPr>
+          <p:cNvSpPr txBox="1"/>
+          <p:nvPr/>
+        </p:nvSpPr>
+        <p:spPr>
+          <a:xfrm>
+            <a:off x="698500" y="3185585"/>
+            <a:ext cx="3048000" cy="805180"/>
+          </a:xfrm>
+          <a:prstGeom prst="rect">
+            <a:avLst/>
+          </a:prstGeom>
+          <a:noFill/>
+        </p:spPr>
+        <p:txBody>
+          <a:bodyPr vertOverflow="overflow" vert="horz" wrap="square" rtlCol="0" anchor="t">
+            <a:noAutofit/>
+          </a:bodyPr>
+          <a:lstStyle/>
+          <a:p>
+            <a:pPr algn="l"/>
+            <a:r>
+              <a:rPr lang="ko-KR" altLang="en-US" sz="1100">
+                <a:solidFill>
+                  <a:srgbClr val="555555"/>
+                </a:solidFill>
+                <a:latin typeface="나눔고딕" panose="020D0604000000000000" pitchFamily="50" charset="-127"/>
+                <a:ea typeface="나눔고딕" panose="020D0604000000000000" pitchFamily="50" charset="-127"/>
+                <a:cs typeface="Arial" panose="020B0604020202020204" pitchFamily="34" charset="0"/>
+              </a:rPr>
+              <a:t>전체 구간에서 Fusion F1 0.88 &lt; 센서 0.93</a:t>
+            </a:r>
+          </a:p>
+          <a:p>
+            <a:r>
+              <a:rPr sz="1100">
+                <a:solidFill>
+                  <a:srgbClr val="555555"/>
+                </a:solidFill>
+              </a:rPr>
+              <a:t>→ 멀티모달이 단독보다 낮게 나옴</a:t>
+            </a:r>
+          </a:p>
+        </p:txBody>
+      </p:sp>
+      <p:sp>
+        <p:nvSpPr>
+          <p:cNvPr id="10" name="사각형: 둥근 모서리 9">
+            <a:extLst>
+              <a:ext uri="{FF2B5EF4-FFF2-40B4-BE49-F238E27FC236}">
+                <a16:creationId xmlns:a16="http://schemas.microsoft.com/office/drawing/2014/main" id="{DA909A98-DF5F-43AB-A3AD-DAFD96B69844}"/>
+              </a:ext>
+            </a:extLst>
+          </p:cNvPr>
+          <p:cNvSpPr/>
+          <p:nvPr/>
+        </p:nvSpPr>
+        <p:spPr>
+          <a:xfrm>
+            <a:off x="4381500" y="1795407"/>
+            <a:ext cx="3429000" cy="2286000"/>
+          </a:xfrm>
+          <a:prstGeom prst="roundRect">
+            <a:avLst/>
+          </a:prstGeom>
+          <a:solidFill>
+            <a:srgbClr val="F0F4F8"/>
+          </a:solidFill>
+          <a:ln w="12700" cap="flat" cmpd="sng" algn="ctr">
+            <a:noFill/>
+            <a:prstDash val="solid"/>
+            <a:miter lim="800000"/>
+          </a:ln>
+        </p:spPr>
+        <p:style>
+          <a:lnRef idx="2">
+            <a:schemeClr val="accent1">
+              <a:shade val="15000"/>
+            </a:schemeClr>
+          </a:lnRef>
+          <a:fillRef idx="1">
+            <a:schemeClr val="accent1"/>
+          </a:fillRef>
+          <a:effectRef idx="0">
+            <a:schemeClr val="accent1"/>
+          </a:effectRef>
+          <a:fontRef idx="minor">
+            <a:schemeClr val="lt1"/>
+          </a:fontRef>
+        </p:style>
+        <p:txBody>
+          <a:bodyPr vertOverflow="clip" horzOverflow="clip" rtlCol="0" anchor="t"/>
+          <a:lstStyle/>
+          <a:p>
+            <a:pPr algn="l"/>
+            <a:endParaRPr lang="ko-KR" altLang="en-US"/>
+          </a:p>
+        </p:txBody>
+      </p:sp>
+      <p:sp>
+        <p:nvSpPr>
+          <p:cNvPr id="11" name="타원 10">
+            <a:extLst>
+              <a:ext uri="{FF2B5EF4-FFF2-40B4-BE49-F238E27FC236}">
+                <a16:creationId xmlns:a16="http://schemas.microsoft.com/office/drawing/2014/main" id="{AD77D43F-E4C2-47A6-A3F4-17EB0C92814C}"/>
+              </a:ext>
+            </a:extLst>
+          </p:cNvPr>
+          <p:cNvSpPr/>
+          <p:nvPr/>
+        </p:nvSpPr>
+        <p:spPr>
+          <a:xfrm>
+            <a:off x="4572000" y="1960507"/>
+            <a:ext cx="558800" cy="558800"/>
+          </a:xfrm>
+          <a:prstGeom prst="ellipse">
+            <a:avLst/>
+          </a:prstGeom>
+          <a:solidFill>
+            <a:srgbClr val="2676AC"/>
+          </a:solidFill>
+          <a:ln w="12700" cap="flat" cmpd="sng" algn="ctr">
+            <a:noFill/>
+            <a:prstDash val="solid"/>
+            <a:miter lim="800000"/>
+          </a:ln>
+        </p:spPr>
+        <p:style>
+          <a:lnRef idx="2">
+            <a:schemeClr val="accent1">
+              <a:shade val="15000"/>
+            </a:schemeClr>
+          </a:lnRef>
+          <a:fillRef idx="1">
+            <a:schemeClr val="accent1"/>
+          </a:fillRef>
+          <a:effectRef idx="0">
+            <a:schemeClr val="accent1"/>
+          </a:effectRef>
+          <a:fontRef idx="minor">
+            <a:schemeClr val="lt1"/>
+          </a:fontRef>
+        </p:style>
+        <p:txBody>
+          <a:bodyPr vertOverflow="clip" horzOverflow="clip" wrap="none" rtlCol="0" anchor="ctr" anchorCtr="0">
+            <a:noAutofit/>
+          </a:bodyPr>
+          <a:lstStyle/>
+          <a:p>
+            <a:pPr algn="ctr"/>
+            <a:r>
+              <a:rPr lang="en-US" altLang="ko-KR" b="1">
+                <a:solidFill>
+                  <a:srgbClr val="FFFFFF"/>
+                </a:solidFill>
+              </a:rPr>
+              <a:t>2</a:t>
+            </a:r>
+            <a:endParaRPr lang="ko-KR" altLang="en-US" b="1">
+              <a:solidFill>
+                <a:srgbClr val="FFFFFF"/>
+              </a:solidFill>
+            </a:endParaRPr>
+          </a:p>
+        </p:txBody>
+      </p:sp>
+      <p:sp>
+        <p:nvSpPr>
+          <p:cNvPr id="12" name="TextBox 11">
+            <a:extLst>
+              <a:ext uri="{FF2B5EF4-FFF2-40B4-BE49-F238E27FC236}">
+                <a16:creationId xmlns:a16="http://schemas.microsoft.com/office/drawing/2014/main" id="{8539E669-4223-4495-B9BD-16B39089B15E}"/>
+              </a:ext>
+            </a:extLst>
+          </p:cNvPr>
+          <p:cNvSpPr txBox="1"/>
+          <p:nvPr/>
+        </p:nvSpPr>
+        <p:spPr>
+          <a:xfrm>
+            <a:off x="4572000" y="2766485"/>
+            <a:ext cx="3048000" cy="381000"/>
+          </a:xfrm>
+          <a:prstGeom prst="rect">
+            <a:avLst/>
+          </a:prstGeom>
+          <a:noFill/>
+        </p:spPr>
+        <p:txBody>
+          <a:bodyPr vertOverflow="overflow" vert="horz" wrap="square" rtlCol="0" anchor="t">
+            <a:noAutofit/>
+          </a:bodyPr>
+          <a:lstStyle/>
+          <a:p>
+            <a:pPr algn="l"/>
+            <a:r>
+              <a:rPr lang="ko-KR" altLang="en-US" sz="1400" b="1">
+                <a:solidFill>
+                  <a:srgbClr val="1B2A4A"/>
+                </a:solidFill>
+                <a:latin typeface="나눔고딕" panose="020D0604000000000000" pitchFamily="50" charset="-127"/>
+                <a:ea typeface="나눔고딕" panose="020D0604000000000000" pitchFamily="50" charset="-127"/>
+                <a:cs typeface="Arial" panose="020B0604020202020204" pitchFamily="34" charset="0"/>
+              </a:rPr>
+              <a:t>원인 가설: 데이터 균형</a:t>
+            </a:r>
+          </a:p>
+        </p:txBody>
+      </p:sp>
+      <p:sp>
+        <p:nvSpPr>
+          <p:cNvPr id="13" name="TextBox 12">
+            <a:extLst>
+              <a:ext uri="{FF2B5EF4-FFF2-40B4-BE49-F238E27FC236}">
+                <a16:creationId xmlns:a16="http://schemas.microsoft.com/office/drawing/2014/main" id="{3E72EADB-F944-40B1-8E9C-01DB9245986F}"/>
+              </a:ext>
+            </a:extLst>
+          </p:cNvPr>
+          <p:cNvSpPr txBox="1"/>
+          <p:nvPr/>
+        </p:nvSpPr>
+        <p:spPr>
+          <a:xfrm>
+            <a:off x="4572000" y="3185585"/>
+            <a:ext cx="3048000" cy="805180"/>
+          </a:xfrm>
+          <a:prstGeom prst="rect">
+            <a:avLst/>
+          </a:prstGeom>
+          <a:noFill/>
+        </p:spPr>
+        <p:txBody>
+          <a:bodyPr vertOverflow="overflow" vert="horz" wrap="square" rtlCol="0" anchor="t">
+            <a:noAutofit/>
+          </a:bodyPr>
+          <a:lstStyle/>
+          <a:p>
+            <a:pPr algn="l"/>
+            <a:r>
+              <a:rPr lang="ko-KR" altLang="en-US" sz="1100">
+                <a:solidFill>
+                  <a:srgbClr val="555555"/>
+                </a:solidFill>
+                <a:latin typeface="나눔고딕" panose="020D0604000000000000" pitchFamily="50" charset="-127"/>
+                <a:ea typeface="나눔고딕" panose="020D0604000000000000" pitchFamily="50" charset="-127"/>
+                <a:cs typeface="Arial" panose="020B0604020202020204" pitchFamily="34" charset="0"/>
+              </a:rPr>
+              <a:t>이미지 9.5천 장 vs 센서 12만 시퀀스</a:t>
+            </a:r>
+          </a:p>
+          <a:p>
+            <a:r>
+              <a:rPr sz="1100">
+                <a:solidFill>
+                  <a:srgbClr val="555555"/>
+                </a:solidFill>
+              </a:rPr>
+              <a:t>→ 불균형으로 이미지가 노이즈로 작용한다고 진단</a:t>
+            </a:r>
+          </a:p>
+        </p:txBody>
+      </p:sp>
+      <p:sp>
+        <p:nvSpPr>
+          <p:cNvPr id="14" name="사각형: 둥근 모서리 13">
+            <a:extLst>
+              <a:ext uri="{FF2B5EF4-FFF2-40B4-BE49-F238E27FC236}">
+                <a16:creationId xmlns:a16="http://schemas.microsoft.com/office/drawing/2014/main" id="{959A7773-03D9-44AC-BF27-C60E7BED8DBC}"/>
+              </a:ext>
+            </a:extLst>
+          </p:cNvPr>
+          <p:cNvSpPr/>
+          <p:nvPr/>
+        </p:nvSpPr>
+        <p:spPr>
+          <a:xfrm>
+            <a:off x="8255000" y="1795407"/>
+            <a:ext cx="3429000" cy="2286000"/>
+          </a:xfrm>
+          <a:prstGeom prst="roundRect">
+            <a:avLst/>
+          </a:prstGeom>
+          <a:solidFill>
+            <a:srgbClr val="F0F4F8"/>
+          </a:solidFill>
+          <a:ln w="12700" cap="flat" cmpd="sng" algn="ctr">
+            <a:noFill/>
+            <a:prstDash val="solid"/>
+            <a:miter lim="800000"/>
+          </a:ln>
+        </p:spPr>
+        <p:style>
+          <a:lnRef idx="2">
+            <a:schemeClr val="accent1">
+              <a:shade val="15000"/>
+            </a:schemeClr>
+          </a:lnRef>
+          <a:fillRef idx="1">
+            <a:schemeClr val="accent1"/>
+          </a:fillRef>
+          <a:effectRef idx="0">
+            <a:schemeClr val="accent1"/>
+          </a:effectRef>
+          <a:fontRef idx="minor">
+            <a:schemeClr val="lt1"/>
+          </a:fontRef>
+        </p:style>
+        <p:txBody>
+          <a:bodyPr vertOverflow="clip" horzOverflow="clip" rtlCol="0" anchor="t"/>
+          <a:lstStyle/>
+          <a:p>
+            <a:pPr algn="l"/>
+            <a:endParaRPr lang="ko-KR" altLang="en-US"/>
+          </a:p>
+        </p:txBody>
+      </p:sp>
+      <p:sp>
+        <p:nvSpPr>
+          <p:cNvPr id="15" name="타원 14">
+            <a:extLst>
+              <a:ext uri="{FF2B5EF4-FFF2-40B4-BE49-F238E27FC236}">
+                <a16:creationId xmlns:a16="http://schemas.microsoft.com/office/drawing/2014/main" id="{A8C3D7CA-D422-4BD2-B749-77AAD111C442}"/>
+              </a:ext>
+            </a:extLst>
+          </p:cNvPr>
+          <p:cNvSpPr/>
+          <p:nvPr/>
+        </p:nvSpPr>
+        <p:spPr>
+          <a:xfrm>
+            <a:off x="8445500" y="1960507"/>
+            <a:ext cx="558800" cy="558800"/>
+          </a:xfrm>
+          <a:prstGeom prst="ellipse">
+            <a:avLst/>
+          </a:prstGeom>
+          <a:solidFill>
+            <a:srgbClr val="F29E16"/>
+          </a:solidFill>
+          <a:ln w="12700" cap="flat" cmpd="sng" algn="ctr">
+            <a:noFill/>
+            <a:prstDash val="solid"/>
+            <a:miter lim="800000"/>
+          </a:ln>
+        </p:spPr>
+        <p:style>
+          <a:lnRef idx="2">
+            <a:schemeClr val="accent1">
+              <a:shade val="15000"/>
+            </a:schemeClr>
+          </a:lnRef>
+          <a:fillRef idx="1">
+            <a:schemeClr val="accent1"/>
+          </a:fillRef>
+          <a:effectRef idx="0">
+            <a:schemeClr val="accent1"/>
+          </a:effectRef>
+          <a:fontRef idx="minor">
+            <a:schemeClr val="lt1"/>
+          </a:fontRef>
+        </p:style>
+        <p:txBody>
+          <a:bodyPr vertOverflow="clip" horzOverflow="clip" wrap="none" rtlCol="0" anchor="ctr" anchorCtr="0">
+            <a:noAutofit/>
+          </a:bodyPr>
+          <a:lstStyle/>
+          <a:p>
+            <a:pPr algn="ctr"/>
+            <a:r>
+              <a:rPr lang="en-US" altLang="ko-KR" b="1">
+                <a:solidFill>
+                  <a:srgbClr val="FFFFFF"/>
+                </a:solidFill>
+              </a:rPr>
+              <a:t>3</a:t>
+            </a:r>
+            <a:endParaRPr lang="ko-KR" altLang="en-US" b="1">
+              <a:solidFill>
+                <a:srgbClr val="FFFFFF"/>
+              </a:solidFill>
+            </a:endParaRPr>
+          </a:p>
+        </p:txBody>
+      </p:sp>
+      <p:sp>
+        <p:nvSpPr>
+          <p:cNvPr id="16" name="TextBox 15">
+            <a:extLst>
+              <a:ext uri="{FF2B5EF4-FFF2-40B4-BE49-F238E27FC236}">
+                <a16:creationId xmlns:a16="http://schemas.microsoft.com/office/drawing/2014/main" id="{2E5936FC-FE61-42EE-B66E-AD61043C53DE}"/>
+              </a:ext>
+            </a:extLst>
+          </p:cNvPr>
+          <p:cNvSpPr txBox="1"/>
+          <p:nvPr/>
+        </p:nvSpPr>
+        <p:spPr>
+          <a:xfrm>
+            <a:off x="8445500" y="2766485"/>
+            <a:ext cx="3048000" cy="381000"/>
+          </a:xfrm>
+          <a:prstGeom prst="rect">
+            <a:avLst/>
+          </a:prstGeom>
+          <a:noFill/>
+        </p:spPr>
+        <p:txBody>
+          <a:bodyPr vertOverflow="overflow" vert="horz" wrap="square" rtlCol="0" anchor="t">
+            <a:noAutofit/>
+          </a:bodyPr>
+          <a:lstStyle/>
+          <a:p>
+            <a:pPr algn="l"/>
+            <a:r>
+              <a:rPr lang="ko-KR" altLang="en-US" sz="1400" b="1">
+                <a:solidFill>
+                  <a:srgbClr val="1B2A4A"/>
+                </a:solidFill>
+                <a:latin typeface="나눔고딕" panose="020D0604000000000000" pitchFamily="50" charset="-127"/>
+                <a:ea typeface="나눔고딕" panose="020D0604000000000000" pitchFamily="50" charset="-127"/>
+                <a:cs typeface="Arial" panose="020B0604020202020204" pitchFamily="34" charset="0"/>
+              </a:rPr>
+              <a:t>최종: 가설 검증됨</a:t>
+            </a:r>
+          </a:p>
+        </p:txBody>
+      </p:sp>
+      <p:sp>
+        <p:nvSpPr>
+          <p:cNvPr id="17" name="TextBox 16">
+            <a:extLst>
+              <a:ext uri="{FF2B5EF4-FFF2-40B4-BE49-F238E27FC236}">
+                <a16:creationId xmlns:a16="http://schemas.microsoft.com/office/drawing/2014/main" id="{E9519485-7AED-4405-A759-96C3E903A76C}"/>
+              </a:ext>
+            </a:extLst>
+          </p:cNvPr>
+          <p:cNvSpPr txBox="1"/>
+          <p:nvPr/>
+        </p:nvSpPr>
+        <p:spPr>
+          <a:xfrm>
+            <a:off x="8445500" y="3185585"/>
+            <a:ext cx="3048000" cy="805180"/>
+          </a:xfrm>
+          <a:prstGeom prst="rect">
+            <a:avLst/>
+          </a:prstGeom>
+          <a:noFill/>
+        </p:spPr>
+        <p:txBody>
+          <a:bodyPr vertOverflow="overflow" vert="horz" wrap="square" rtlCol="0" anchor="t">
+            <a:noAutofit/>
+          </a:bodyPr>
+          <a:lstStyle/>
+          <a:p>
+            <a:pPr algn="l"/>
+            <a:r>
+              <a:rPr lang="ko-KR" altLang="en-US" sz="1100">
+                <a:solidFill>
+                  <a:srgbClr val="555555"/>
+                </a:solidFill>
+                <a:latin typeface="나눔고딕" panose="020D0604000000000000" pitchFamily="50" charset="-127"/>
+                <a:ea typeface="나눔고딕" panose="020D0604000000000000" pitchFamily="50" charset="-127"/>
+                <a:cs typeface="Arial" panose="020B0604020202020204" pitchFamily="34" charset="0"/>
+              </a:rPr>
+              <a:t>이미지 커버리지 확장 + 융합전략 개선</a:t>
+            </a:r>
+          </a:p>
+          <a:p>
+            <a:r>
+              <a:rPr sz="1100">
+                <a:solidFill>
+                  <a:srgbClr val="555555"/>
+                </a:solidFill>
+              </a:rPr>
+              <a:t>→ 두 모달이 함께 있는 구간에서 Fusion 0.986 &gt; 두 단독 (유의)</a:t>
+            </a:r>
+          </a:p>
+        </p:txBody>
+      </p:sp>
+      <p:sp>
+        <p:nvSpPr>
+          <p:cNvPr id="18" name="사각형: 둥근 모서리 17">
+            <a:extLst>
+              <a:ext uri="{FF2B5EF4-FFF2-40B4-BE49-F238E27FC236}">
+                <a16:creationId xmlns:a16="http://schemas.microsoft.com/office/drawing/2014/main" id="{3BDF29AB-32B2-4ABC-AEB6-8C0EE16496B9}"/>
+              </a:ext>
+            </a:extLst>
+          </p:cNvPr>
+          <p:cNvSpPr/>
+          <p:nvPr/>
+        </p:nvSpPr>
+        <p:spPr>
+          <a:xfrm>
+            <a:off x="508000" y="4335407"/>
+            <a:ext cx="11176000" cy="635000"/>
+          </a:xfrm>
+          <a:prstGeom prst="roundRect">
+            <a:avLst/>
+          </a:prstGeom>
+          <a:solidFill>
+            <a:srgbClr val="EBF5FB"/>
+          </a:solidFill>
+          <a:ln w="12700" cap="flat" cmpd="sng" algn="ctr">
+            <a:noFill/>
+            <a:prstDash val="solid"/>
+            <a:miter lim="800000"/>
+          </a:ln>
+        </p:spPr>
+        <p:style>
+          <a:lnRef idx="2">
+            <a:schemeClr val="accent1">
+              <a:shade val="15000"/>
+            </a:schemeClr>
+          </a:lnRef>
+          <a:fillRef idx="1">
+            <a:schemeClr val="accent1"/>
+          </a:fillRef>
+          <a:effectRef idx="0">
+            <a:schemeClr val="accent1"/>
+          </a:effectRef>
+          <a:fontRef idx="minor">
+            <a:schemeClr val="lt1"/>
+          </a:fontRef>
+        </p:style>
+        <p:txBody>
+          <a:bodyPr vertOverflow="clip" horzOverflow="clip" rtlCol="0" anchor="t"/>
+          <a:lstStyle/>
+          <a:p>
+            <a:pPr algn="l"/>
+            <a:endParaRPr lang="ko-KR" altLang="en-US"/>
+          </a:p>
+        </p:txBody>
+      </p:sp>
+      <p:sp>
+        <p:nvSpPr>
+          <p:cNvPr id="19" name="TextBox 18">
+            <a:extLst>
+              <a:ext uri="{FF2B5EF4-FFF2-40B4-BE49-F238E27FC236}">
+                <a16:creationId xmlns:a16="http://schemas.microsoft.com/office/drawing/2014/main" id="{ECB4E20F-CA0E-4EF6-A20A-82BB4499ECA0}"/>
+              </a:ext>
+            </a:extLst>
+          </p:cNvPr>
+          <p:cNvSpPr txBox="1"/>
+          <p:nvPr/>
+        </p:nvSpPr>
+        <p:spPr>
+          <a:xfrm>
+            <a:off x="698500" y="4506499"/>
+            <a:ext cx="10795000" cy="444500"/>
+          </a:xfrm>
+          <a:prstGeom prst="rect">
+            <a:avLst/>
+          </a:prstGeom>
+          <a:noFill/>
+        </p:spPr>
+        <p:txBody>
+          <a:bodyPr vertOverflow="overflow" vert="horz" wrap="square" rtlCol="0" anchor="t">
+            <a:noAutofit/>
+          </a:bodyPr>
+          <a:lstStyle/>
+          <a:p>
+            <a:pPr algn="l"/>
+            <a:r>
+              <a:rPr lang="ko-KR" altLang="en-US" sz="1400" b="1">
+                <a:solidFill>
+                  <a:srgbClr val="2676AC"/>
+                </a:solidFill>
+                <a:latin typeface="나눔고딕" panose="020D0604000000000000" pitchFamily="50" charset="-127"/>
+                <a:ea typeface="나눔고딕" panose="020D0604000000000000" pitchFamily="50" charset="-127"/>
+                <a:cs typeface="Arial" panose="020B0604020202020204" pitchFamily="34" charset="0"/>
+              </a:rPr>
+              <a:t>→  멀티모달은 무조건 이기지 않는다. 두 모달이 함께·균형 있게 있을 때 이긴다 — 이 조건을 정량으로 규명</a:t>
             </a:r>
           </a:p>
         </p:txBody>
@@ -11780,7 +12789,7 @@
                 <a:ea typeface="나눔고딕" panose="020D0604000000000000" pitchFamily="50" charset="-127"/>
                 <a:cs typeface="Arial" panose="020B0604020202020204" pitchFamily="34" charset="0"/>
               </a:rPr>
-              <a:t>센서 데이터:  22채널 (그리퍼 부하, 관절 각도, 컨베이어 온도 등)</a:t>
+              <a:t>센서 데이터:  22채널 — 모든 시점에 기록 (전 사이클 구간)</a:t>
             </a:r>
           </a:p>
         </p:txBody>
@@ -11877,7 +12886,7 @@
                 <a:ea typeface="나눔고딕" panose="020D0604000000000000" pitchFamily="50" charset="-127"/>
                 <a:cs typeface="Arial" panose="020B0604020202020204" pitchFamily="34" charset="0"/>
               </a:rPr>
-              <a:t>이미지 데이터:  카메라 2대 동기 촬영, 부품 보이는 단계에서 사용</a:t>
+              <a:t>이미지 데이터:  카메라 2대 — 부품이 보이는 Cycle 4·9 구간에만 존재 (전체 시점의 일부)</a:t>
             </a:r>
           </a:p>
         </p:txBody>
@@ -17884,7 +18893,7 @@
                   <a:srgbClr val="FFFFFF"/>
                 </a:solidFill>
               </a:rPr>
-              <a:t>06</a:t>
+              <a:t>07</a:t>
             </a:r>
             <a:endParaRPr lang="ko-KR" altLang="en-US" sz="1600" b="1">
               <a:solidFill>
@@ -18028,7 +19037,7 @@
         <p:spPr>
           <a:xfrm>
             <a:off x="640080" y="2103120"/>
-            <a:ext cx="3566160" cy="1097280"/>
+            <a:ext cx="3566160" cy="1280160"/>
           </a:xfrm>
           <a:prstGeom prst="rect">
             <a:avLst/>
@@ -18048,7 +19057,7 @@
                 </a:solidFill>
                 <a:latin typeface="맑은 고딕"/>
               </a:rPr>
-              <a:t>두 모달리티 데이터가 모두</a:t>
+              <a:t>센서·이미지가 모두 있는 시점</a:t>
             </a:r>
           </a:p>
           <a:p>
@@ -18059,7 +19068,7 @@
                 </a:solidFill>
                 <a:latin typeface="맑은 고딕"/>
               </a:rPr>
-              <a:t>입력되는 시점 2,161개</a:t>
+              <a:t>3,912개 (Cycle 4·9 중 이미지 매칭 41%)</a:t>
             </a:r>
           </a:p>
           <a:p>
@@ -18070,7 +19079,7 @@
                 </a:solidFill>
                 <a:latin typeface="맑은 고딕"/>
               </a:rPr>
-              <a:t>(Weighted F1)</a:t>
+              <a:t>지표: Weighted F1</a:t>
             </a:r>
           </a:p>
         </p:txBody>
@@ -18182,7 +19191,7 @@
                 </a:solidFill>
                 <a:latin typeface="맑은 고딕"/>
               </a:rPr>
-              <a:t>센서  0.974</a:t>
+              <a:t>센서  0.907</a:t>
             </a:r>
           </a:p>
           <a:p>
@@ -18193,7 +19202,7 @@
                 </a:solidFill>
                 <a:latin typeface="맑은 고딕"/>
               </a:rPr>
-              <a:t>이미지  0.928</a:t>
+              <a:t>이미지  0.925</a:t>
             </a:r>
           </a:p>
           <a:p>
@@ -18204,7 +19213,7 @@
                 </a:solidFill>
                 <a:latin typeface="맑은 고딕"/>
               </a:rPr>
-              <a:t>융합  0.981</a:t>
+              <a:t>융합  0.986</a:t>
             </a:r>
           </a:p>
           <a:p/>
